--- a/PPTs/Ch6_ARM_Control_Flow_Exercises.pptx
+++ b/PPTs/Ch6_ARM_Control_Flow_Exercises.pptx
@@ -5515,7 +5515,7 @@
           <a:p>
             <a:r>
               <a:rPr lang="en-US" dirty="0"/>
-              <a:t>Fall 2025</a:t>
+              <a:t>Fall 2026</a:t>
             </a:r>
           </a:p>
         </p:txBody>
@@ -6211,7 +6211,7 @@
                           <a:latin typeface="Consolas" panose="020B0609020204030204" pitchFamily="49" charset="0"/>
                           <a:cs typeface="Consolas" panose="020B0609020204030204" pitchFamily="49" charset="0"/>
                         </a:rPr>
-                        <a:t>MOV R0, 0x60000000  ; base address where array resides</a:t>
+                        <a:t>MOV R0, #0x60000000  ; base address where array resides</a:t>
                       </a:r>
                     </a:p>
                     <a:p>
@@ -7253,7 +7253,7 @@
                           <a:latin typeface="Consolas" panose="020B0609020204030204" pitchFamily="49" charset="0"/>
                           <a:cs typeface="Consolas" panose="020B0609020204030204" pitchFamily="49" charset="0"/>
                         </a:rPr>
-                        <a:t>MOV R0, 0x60000000</a:t>
+                        <a:t>MOV R0, #0x60000000</a:t>
                       </a:r>
                     </a:p>
                     <a:p>
@@ -7802,7 +7802,7 @@
           <a:p>
             <a:r>
               <a:rPr lang="en-US" dirty="0"/>
-              <a:t>Write a program that reverses the bits in a register, such that the register containing d31,d30,d29...d1,d0 now contains d0,d1,...d29,d30,d3.</a:t>
+              <a:t>Write a program that reverses the bits in a register, such that the register containing d31,d30,d29...d1,d0 now contains d0,d1,...d29,d30,d31.</a:t>
             </a:r>
           </a:p>
         </p:txBody>
@@ -10920,7 +10920,7 @@
           <p:nvPr/>
         </p:nvGraphicFramePr>
         <p:xfrm>
-          <a:off x="751114" y="2296886"/>
+          <a:off x="751114" y="2295144"/>
           <a:ext cx="7391400" cy="1219200"/>
         </p:xfrm>
         <a:graphic>
@@ -10960,7 +10960,7 @@
                         </a:spcAft>
                       </a:pPr>
                       <a:r>
-                        <a:rPr lang="en-US" sz="1600" dirty="0">
+                        <a:rPr lang="en-US" sz="1400" dirty="0">
                           <a:solidFill>
                             <a:schemeClr val="bg1"/>
                           </a:solidFill>
@@ -10970,7 +10970,7 @@
                         </a:rPr>
                         <a:t>Assembly Program</a:t>
                       </a:r>
-                      <a:endParaRPr lang="en-US" sz="1600" dirty="0">
+                      <a:endParaRPr lang="en-US" sz="1400" dirty="0">
                         <a:solidFill>
                           <a:schemeClr val="bg1"/>
                         </a:solidFill>
@@ -11001,7 +11001,7 @@
                         </a:spcAft>
                       </a:pPr>
                       <a:r>
-                        <a:rPr lang="en-US" sz="1600" dirty="0">
+                        <a:rPr lang="en-US" sz="1400" dirty="0">
                           <a:solidFill>
                             <a:schemeClr val="bg1"/>
                           </a:solidFill>
@@ -11011,7 +11011,7 @@
                         </a:rPr>
                         <a:t>C Program</a:t>
                       </a:r>
-                      <a:endParaRPr lang="en-US" sz="1600" dirty="0">
+                      <a:endParaRPr lang="en-US" sz="1400" dirty="0">
                         <a:solidFill>
                           <a:schemeClr val="bg1"/>
                         </a:solidFill>
@@ -11041,7 +11041,7 @@
                     <a:lstStyle/>
                     <a:p>
                       <a:r>
-                        <a:rPr kumimoji="0" lang="en-US" sz="1600" b="1" i="0" kern="1200" dirty="0">
+                        <a:rPr kumimoji="0" lang="en-US" sz="1400" b="1" i="0" kern="1200" dirty="0">
                           <a:solidFill>
                             <a:schemeClr val="tx1"/>
                           </a:solidFill>
@@ -11053,7 +11053,7 @@
                         <a:t>CMP</a:t>
                       </a:r>
                       <a:r>
-                        <a:rPr kumimoji="0" lang="en-US" sz="1600" b="0" i="0" kern="1200" dirty="0">
+                        <a:rPr kumimoji="0" lang="en-US" sz="1400" b="0" i="0" kern="1200" dirty="0">
                           <a:solidFill>
                             <a:schemeClr val="tx1"/>
                           </a:solidFill>
@@ -11067,7 +11067,7 @@
                     </a:p>
                     <a:p>
                       <a:r>
-                        <a:rPr kumimoji="0" lang="en-US" sz="1600" b="1" i="0" kern="1200" dirty="0">
+                        <a:rPr kumimoji="0" lang="en-US" sz="1400" b="1" i="0" kern="1200" dirty="0">
                           <a:solidFill>
                             <a:schemeClr val="tx1"/>
                           </a:solidFill>
@@ -11076,10 +11076,12 @@
                           <a:ea typeface="+mn-ea"/>
                           <a:cs typeface="+mn-cs"/>
                         </a:rPr>
-                        <a:t>MOVEQ</a:t>
-                      </a:r>
-                      <a:r>
-                        <a:rPr kumimoji="0" lang="en-US" sz="1600" b="0" i="0" kern="1200" dirty="0">
+                        <a:t>ITT EQ</a:t>
+                      </a:r>
+                    </a:p>
+                    <a:p>
+                      <a:r>
+                        <a:rPr kumimoji="0" lang="en-US" sz="1400" b="1" i="0" kern="1200" dirty="0">
                           <a:solidFill>
                             <a:schemeClr val="tx1"/>
                           </a:solidFill>
@@ -11088,12 +11090,10 @@
                           <a:ea typeface="+mn-ea"/>
                           <a:cs typeface="+mn-cs"/>
                         </a:rPr>
-                        <a:t> r0, #10  </a:t>
-                      </a:r>
-                    </a:p>
-                    <a:p>
-                      <a:r>
-                        <a:rPr kumimoji="0" lang="en-US" sz="1600" b="1" i="0" kern="1200" dirty="0">
+                        <a:t>MOVEQ</a:t>
+                      </a:r>
+                      <a:r>
+                        <a:rPr kumimoji="0" lang="en-US" sz="1400" b="0" i="0" kern="1200" dirty="0">
                           <a:solidFill>
                             <a:schemeClr val="tx1"/>
                           </a:solidFill>
@@ -11102,10 +11102,12 @@
                           <a:ea typeface="+mn-ea"/>
                           <a:cs typeface="+mn-cs"/>
                         </a:rPr>
-                        <a:t>BLEQ</a:t>
-                      </a:r>
-                      <a:r>
-                        <a:rPr kumimoji="0" lang="en-US" sz="1600" b="0" i="0" kern="1200" dirty="0">
+                        <a:t> r0, #10  </a:t>
+                      </a:r>
+                    </a:p>
+                    <a:p>
+                      <a:r>
+                        <a:rPr kumimoji="0" lang="en-US" sz="1400" b="1" i="0" kern="1200" dirty="0">
                           <a:solidFill>
                             <a:schemeClr val="tx1"/>
                           </a:solidFill>
@@ -11114,10 +11116,10 @@
                           <a:ea typeface="+mn-ea"/>
                           <a:cs typeface="+mn-cs"/>
                         </a:rPr>
-                        <a:t>  </a:t>
-                      </a:r>
-                      <a:r>
-                        <a:rPr kumimoji="0" lang="en-US" sz="1600" b="0" i="0" kern="1200" dirty="0" err="1">
+                        <a:t>BLEQ</a:t>
+                      </a:r>
+                      <a:r>
+                        <a:rPr kumimoji="0" lang="en-US" sz="1400" b="0" i="0" kern="1200" dirty="0">
                           <a:solidFill>
                             <a:schemeClr val="tx1"/>
                           </a:solidFill>
@@ -11126,9 +11128,21 @@
                           <a:ea typeface="+mn-ea"/>
                           <a:cs typeface="+mn-cs"/>
                         </a:rPr>
+                        <a:t>  </a:t>
+                      </a:r>
+                      <a:r>
+                        <a:rPr kumimoji="0" lang="en-US" sz="1400" b="0" i="0" kern="1200" dirty="0" err="1">
+                          <a:solidFill>
+                            <a:schemeClr val="tx1"/>
+                          </a:solidFill>
+                          <a:effectLst/>
+                          <a:latin typeface="Consolas" panose="020B0609020204030204" pitchFamily="49" charset="0"/>
+                          <a:ea typeface="+mn-ea"/>
+                          <a:cs typeface="+mn-cs"/>
+                        </a:rPr>
                         <a:t>fn</a:t>
                       </a:r>
-                      <a:endParaRPr lang="en-US" sz="1600" dirty="0">
+                      <a:endParaRPr lang="en-US" sz="1400" dirty="0">
                         <a:effectLst/>
                         <a:latin typeface="Consolas" panose="020B0609020204030204" pitchFamily="49" charset="0"/>
                         <a:ea typeface="宋体"/>
@@ -11152,7 +11166,7 @@
                         </a:spcAft>
                       </a:pPr>
                       <a:r>
-                        <a:rPr kumimoji="0" lang="en-US" sz="1600" b="0" i="0" kern="1200" dirty="0">
+                        <a:rPr kumimoji="0" lang="en-US" sz="1400" b="0" i="0" kern="1200" dirty="0">
                           <a:solidFill>
                             <a:schemeClr val="tx1"/>
                           </a:solidFill>
@@ -11174,7 +11188,7 @@
                         </a:spcAft>
                       </a:pPr>
                       <a:r>
-                        <a:rPr kumimoji="0" lang="en-US" sz="1600" b="0" i="0" kern="1200" dirty="0">
+                        <a:rPr kumimoji="0" lang="en-US" sz="1400" b="0" i="0" kern="1200" dirty="0">
                           <a:solidFill>
                             <a:schemeClr val="tx1"/>
                           </a:solidFill>
@@ -11196,7 +11210,7 @@
                         </a:spcAft>
                       </a:pPr>
                       <a:r>
-                        <a:rPr kumimoji="0" lang="en-US" sz="1600" b="0" i="0" kern="1200" dirty="0">
+                        <a:rPr kumimoji="0" lang="en-US" sz="1400" b="0" i="0" kern="1200" dirty="0">
                           <a:solidFill>
                             <a:schemeClr val="tx1"/>
                           </a:solidFill>
@@ -11208,7 +11222,7 @@
                         <a:t>  </a:t>
                       </a:r>
                       <a:r>
-                        <a:rPr kumimoji="0" lang="en-US" sz="1600" b="0" i="0" kern="1200" dirty="0" err="1">
+                        <a:rPr kumimoji="0" lang="en-US" sz="1400" b="0" i="0" kern="1200" dirty="0" err="1">
                           <a:solidFill>
                             <a:schemeClr val="tx1"/>
                           </a:solidFill>
@@ -11220,7 +11234,7 @@
                         <a:t>fn</a:t>
                       </a:r>
                       <a:r>
-                        <a:rPr kumimoji="0" lang="en-US" sz="1600" b="0" i="0" kern="1200" dirty="0">
+                        <a:rPr kumimoji="0" lang="en-US" sz="1400" b="0" i="0" kern="1200" dirty="0">
                           <a:solidFill>
                             <a:schemeClr val="tx1"/>
                           </a:solidFill>
@@ -11242,7 +11256,7 @@
                         </a:spcAft>
                       </a:pPr>
                       <a:r>
-                        <a:rPr kumimoji="0" lang="en-US" sz="1600" b="0" i="0" kern="1200" dirty="0">
+                        <a:rPr kumimoji="0" lang="en-US" sz="1400" b="0" i="0" kern="1200" dirty="0">
                           <a:solidFill>
                             <a:schemeClr val="tx1"/>
                           </a:solidFill>
@@ -11253,7 +11267,7 @@
                         </a:rPr>
                         <a:t>}</a:t>
                       </a:r>
-                      <a:endParaRPr lang="en-US" sz="1600" i="0" dirty="0">
+                      <a:endParaRPr lang="en-US" sz="1400" i="0" dirty="0">
                         <a:effectLst/>
                         <a:latin typeface="Consolas" panose="020B0609020204030204" pitchFamily="49" charset="0"/>
                         <a:cs typeface="Consolas" panose="020B0609020204030204" pitchFamily="49" charset="0"/>
@@ -11287,7 +11301,7 @@
           <p:nvPr/>
         </p:nvGraphicFramePr>
         <p:xfrm>
-          <a:off x="751114" y="3559629"/>
+          <a:off x="751114" y="3520440"/>
           <a:ext cx="7391400" cy="1219200"/>
         </p:xfrm>
         <a:graphic>
@@ -11327,7 +11341,7 @@
                         </a:spcAft>
                       </a:pPr>
                       <a:r>
-                        <a:rPr lang="en-US" sz="1600" dirty="0">
+                        <a:rPr lang="en-US" sz="1400" dirty="0">
                           <a:solidFill>
                             <a:schemeClr val="bg1"/>
                           </a:solidFill>
@@ -11337,7 +11351,7 @@
                         </a:rPr>
                         <a:t>Assembly Program</a:t>
                       </a:r>
-                      <a:endParaRPr lang="en-US" sz="1600" dirty="0">
+                      <a:endParaRPr lang="en-US" sz="1400" dirty="0">
                         <a:solidFill>
                           <a:schemeClr val="bg1"/>
                         </a:solidFill>
@@ -11368,7 +11382,7 @@
                         </a:spcAft>
                       </a:pPr>
                       <a:r>
-                        <a:rPr lang="en-US" sz="1600" dirty="0">
+                        <a:rPr lang="en-US" sz="1400" dirty="0">
                           <a:solidFill>
                             <a:schemeClr val="bg1"/>
                           </a:solidFill>
@@ -11378,7 +11392,7 @@
                         </a:rPr>
                         <a:t>C Program</a:t>
                       </a:r>
-                      <a:endParaRPr lang="en-US" sz="1600" dirty="0">
+                      <a:endParaRPr lang="en-US" sz="1400" dirty="0">
                         <a:solidFill>
                           <a:schemeClr val="bg1"/>
                         </a:solidFill>
@@ -11408,7 +11422,7 @@
                     <a:lstStyle/>
                     <a:p>
                       <a:r>
-                        <a:rPr kumimoji="0" lang="pt-BR" sz="1600" b="1" i="0" kern="1200" dirty="0">
+                        <a:rPr kumimoji="0" lang="pt-BR" sz="1400" b="1" i="0" kern="1200" dirty="0">
                           <a:solidFill>
                             <a:schemeClr val="tx1"/>
                           </a:solidFill>
@@ -11420,7 +11434,7 @@
                         <a:t>CMP</a:t>
                       </a:r>
                       <a:r>
-                        <a:rPr kumimoji="0" lang="pt-BR" sz="1600" b="0" i="0" kern="1200" dirty="0">
+                        <a:rPr kumimoji="0" lang="pt-BR" sz="1400" b="0" i="0" kern="1200" dirty="0">
                           <a:solidFill>
                             <a:schemeClr val="tx1"/>
                           </a:solidFill>
@@ -11434,7 +11448,7 @@
                     </a:p>
                     <a:p>
                       <a:r>
-                        <a:rPr kumimoji="0" lang="pt-BR" sz="1600" b="1" i="0" kern="1200" dirty="0">
+                        <a:rPr kumimoji="0" lang="pt-BR" sz="1400" b="1" i="0" kern="1200" dirty="0">
                           <a:solidFill>
                             <a:schemeClr val="tx1"/>
                           </a:solidFill>
@@ -11443,10 +11457,12 @@
                           <a:ea typeface="+mn-ea"/>
                           <a:cs typeface="+mn-cs"/>
                         </a:rPr>
-                        <a:t>MOVLE</a:t>
-                      </a:r>
-                      <a:r>
-                        <a:rPr kumimoji="0" lang="pt-BR" sz="1600" b="0" i="0" kern="1200" dirty="0">
+                        <a:t>ITE LE</a:t>
+                      </a:r>
+                    </a:p>
+                    <a:p>
+                      <a:r>
+                        <a:rPr kumimoji="0" lang="pt-BR" sz="1400" b="1" i="0" kern="1200" dirty="0">
                           <a:solidFill>
                             <a:schemeClr val="tx1"/>
                           </a:solidFill>
@@ -11455,12 +11471,10 @@
                           <a:ea typeface="+mn-ea"/>
                           <a:cs typeface="+mn-cs"/>
                         </a:rPr>
-                        <a:t> r0, #0   </a:t>
-                      </a:r>
-                    </a:p>
-                    <a:p>
-                      <a:r>
-                        <a:rPr kumimoji="0" lang="pt-BR" sz="1600" b="1" i="0" kern="1200" dirty="0">
+                        <a:t>MOVLE</a:t>
+                      </a:r>
+                      <a:r>
+                        <a:rPr kumimoji="0" lang="pt-BR" sz="1400" b="0" i="0" kern="1200" dirty="0">
                           <a:solidFill>
                             <a:schemeClr val="tx1"/>
                           </a:solidFill>
@@ -11469,10 +11483,12 @@
                           <a:ea typeface="+mn-ea"/>
                           <a:cs typeface="+mn-cs"/>
                         </a:rPr>
-                        <a:t>MOVGT</a:t>
-                      </a:r>
-                      <a:r>
-                        <a:rPr kumimoji="0" lang="pt-BR" sz="1600" b="0" i="0" kern="1200" dirty="0">
+                        <a:t> r0, #0   </a:t>
+                      </a:r>
+                    </a:p>
+                    <a:p>
+                      <a:r>
+                        <a:rPr kumimoji="0" lang="pt-BR" sz="1400" b="1" i="0" kern="1200" dirty="0">
                           <a:solidFill>
                             <a:schemeClr val="tx1"/>
                           </a:solidFill>
@@ -11481,9 +11497,21 @@
                           <a:ea typeface="+mn-ea"/>
                           <a:cs typeface="+mn-cs"/>
                         </a:rPr>
+                        <a:t>MOVGT</a:t>
+                      </a:r>
+                      <a:r>
+                        <a:rPr kumimoji="0" lang="pt-BR" sz="1400" b="0" i="0" kern="1200" dirty="0">
+                          <a:solidFill>
+                            <a:schemeClr val="tx1"/>
+                          </a:solidFill>
+                          <a:effectLst/>
+                          <a:latin typeface="Consolas" panose="020B0609020204030204" pitchFamily="49" charset="0"/>
+                          <a:ea typeface="+mn-ea"/>
+                          <a:cs typeface="+mn-cs"/>
+                        </a:rPr>
                         <a:t> r0, #1</a:t>
                       </a:r>
-                      <a:endParaRPr lang="en-US" sz="1600" dirty="0">
+                      <a:endParaRPr lang="en-US" sz="1400" dirty="0">
                         <a:effectLst/>
                         <a:latin typeface="Consolas" panose="020B0609020204030204" pitchFamily="49" charset="0"/>
                         <a:ea typeface="宋体"/>
@@ -11498,28 +11526,28 @@
                     <a:bodyPr/>
                     <a:lstStyle/>
                     <a:p>
-                      <a:endParaRPr lang="en-US" sz="1600" i="0" dirty="0">
+                      <a:endParaRPr lang="en-US" sz="1400" i="0" dirty="0">
                         <a:effectLst/>
                         <a:latin typeface="Consolas" panose="020B0609020204030204" pitchFamily="49" charset="0"/>
                         <a:cs typeface="Consolas" panose="020B0609020204030204" pitchFamily="49" charset="0"/>
                       </a:endParaRPr>
                     </a:p>
                     <a:p>
-                      <a:endParaRPr lang="en-US" sz="1600" i="0" dirty="0">
+                      <a:endParaRPr lang="en-US" sz="1400" i="0" dirty="0">
                         <a:effectLst/>
                         <a:latin typeface="Consolas" panose="020B0609020204030204" pitchFamily="49" charset="0"/>
                         <a:cs typeface="Consolas" panose="020B0609020204030204" pitchFamily="49" charset="0"/>
                       </a:endParaRPr>
                     </a:p>
                     <a:p>
-                      <a:endParaRPr lang="en-US" sz="1600" i="0" dirty="0">
+                      <a:endParaRPr lang="en-US" sz="1400" i="0" dirty="0">
                         <a:effectLst/>
                         <a:latin typeface="Consolas" panose="020B0609020204030204" pitchFamily="49" charset="0"/>
                         <a:cs typeface="Consolas" panose="020B0609020204030204" pitchFamily="49" charset="0"/>
                       </a:endParaRPr>
                     </a:p>
                     <a:p>
-                      <a:endParaRPr lang="en-US" sz="1600" i="0" dirty="0">
+                      <a:endParaRPr lang="en-US" sz="1400" i="0" dirty="0">
                         <a:effectLst/>
                         <a:latin typeface="Consolas" panose="020B0609020204030204" pitchFamily="49" charset="0"/>
                         <a:cs typeface="Consolas" panose="020B0609020204030204" pitchFamily="49" charset="0"/>
@@ -11553,7 +11581,7 @@
           <p:nvPr/>
         </p:nvGraphicFramePr>
         <p:xfrm>
-          <a:off x="751114" y="4822372"/>
+          <a:off x="751114" y="4745736"/>
           <a:ext cx="7391400" cy="1017070"/>
         </p:xfrm>
         <a:graphic>
@@ -11593,7 +11621,7 @@
                         </a:spcAft>
                       </a:pPr>
                       <a:r>
-                        <a:rPr lang="en-US" sz="1600" dirty="0">
+                        <a:rPr lang="en-US" sz="1400" dirty="0">
                           <a:solidFill>
                             <a:schemeClr val="bg1"/>
                           </a:solidFill>
@@ -11603,7 +11631,7 @@
                         </a:rPr>
                         <a:t>Assembly Program</a:t>
                       </a:r>
-                      <a:endParaRPr lang="en-US" sz="1600" dirty="0">
+                      <a:endParaRPr lang="en-US" sz="1400" dirty="0">
                         <a:solidFill>
                           <a:schemeClr val="bg1"/>
                         </a:solidFill>
@@ -11634,7 +11662,7 @@
                         </a:spcAft>
                       </a:pPr>
                       <a:r>
-                        <a:rPr lang="en-US" sz="1600" dirty="0">
+                        <a:rPr lang="en-US" sz="1400" dirty="0">
                           <a:solidFill>
                             <a:schemeClr val="bg1"/>
                           </a:solidFill>
@@ -11645,7 +11673,7 @@
                         <a:t>C </a:t>
                       </a:r>
                       <a:r>
-                        <a:rPr lang="en-US" sz="1600" dirty="0" err="1">
+                        <a:rPr lang="en-US" sz="1400" dirty="0" err="1">
                           <a:solidFill>
                             <a:schemeClr val="bg1"/>
                           </a:solidFill>
@@ -11653,9 +11681,9 @@
                           <a:latin typeface="Consolas" panose="020B0609020204030204" pitchFamily="49" charset="0"/>
                           <a:cs typeface="Consolas" panose="020B0609020204030204" pitchFamily="49" charset="0"/>
                         </a:rPr>
-                        <a:t>rogram</a:t>
-                      </a:r>
-                      <a:endParaRPr lang="en-US" sz="1600" dirty="0">
+                        <a:t>Program</a:t>
+                      </a:r>
+                      <a:endParaRPr lang="en-US" sz="1400" dirty="0">
                         <a:solidFill>
                           <a:schemeClr val="bg1"/>
                         </a:solidFill>
@@ -11685,7 +11713,7 @@
                     <a:lstStyle/>
                     <a:p>
                       <a:r>
-                        <a:rPr kumimoji="0" lang="pt-BR" sz="1600" b="1" i="0" kern="1200" dirty="0">
+                        <a:rPr kumimoji="0" lang="pt-BR" sz="1400" b="1" i="0" kern="1200" dirty="0">
                           <a:solidFill>
                             <a:schemeClr val="tx1"/>
                           </a:solidFill>
@@ -11697,7 +11725,7 @@
                         <a:t>CMP</a:t>
                       </a:r>
                       <a:r>
-                        <a:rPr kumimoji="0" lang="pt-BR" sz="1600" b="0" i="0" kern="1200" dirty="0">
+                        <a:rPr kumimoji="0" lang="pt-BR" sz="1400" b="0" i="0" kern="1200" dirty="0">
                           <a:solidFill>
                             <a:schemeClr val="tx1"/>
                           </a:solidFill>
@@ -11709,7 +11737,7 @@
                         <a:t>   r0, #'A’</a:t>
                       </a:r>
                       <a:r>
-                        <a:rPr kumimoji="0" lang="pt-BR" sz="1600" b="0" i="1" kern="1200" dirty="0">
+                        <a:rPr kumimoji="0" lang="pt-BR" sz="1400" b="0" i="1" kern="1200" dirty="0">
                           <a:solidFill>
                             <a:schemeClr val="tx1"/>
                           </a:solidFill>
@@ -11723,7 +11751,7 @@
                     </a:p>
                     <a:p>
                       <a:r>
-                        <a:rPr kumimoji="0" lang="pt-BR" sz="1600" b="1" i="0" kern="1200" dirty="0">
+                        <a:rPr kumimoji="0" lang="pt-BR" sz="1400" b="1" i="0" kern="1200" dirty="0">
                           <a:solidFill>
                             <a:schemeClr val="tx1"/>
                           </a:solidFill>
@@ -11732,10 +11760,12 @@
                           <a:ea typeface="+mn-ea"/>
                           <a:cs typeface="+mn-cs"/>
                         </a:rPr>
-                        <a:t>CMPNE</a:t>
-                      </a:r>
-                      <a:r>
-                        <a:rPr kumimoji="0" lang="pt-BR" sz="1600" b="0" i="0" kern="1200" dirty="0">
+                        <a:t>ITE NE</a:t>
+                      </a:r>
+                    </a:p>
+                    <a:p>
+                      <a:r>
+                        <a:rPr kumimoji="0" lang="pt-BR" sz="1400" b="1" i="0" kern="1200" dirty="0">
                           <a:solidFill>
                             <a:schemeClr val="tx1"/>
                           </a:solidFill>
@@ -11744,10 +11774,10 @@
                           <a:ea typeface="+mn-ea"/>
                           <a:cs typeface="+mn-cs"/>
                         </a:rPr>
-                        <a:t> r0, #'</a:t>
-                      </a:r>
-                      <a:r>
-                        <a:rPr kumimoji="0" lang="pt-BR" sz="1600" b="1" i="0" kern="1200" dirty="0">
+                        <a:t>CMPNE</a:t>
+                      </a:r>
+                      <a:r>
+                        <a:rPr kumimoji="0" lang="pt-BR" sz="1400" b="0" i="0" kern="1200" dirty="0">
                           <a:solidFill>
                             <a:schemeClr val="tx1"/>
                           </a:solidFill>
@@ -11756,10 +11786,10 @@
                           <a:ea typeface="+mn-ea"/>
                           <a:cs typeface="+mn-cs"/>
                         </a:rPr>
-                        <a:t>B</a:t>
-                      </a:r>
-                      <a:r>
-                        <a:rPr kumimoji="0" lang="pt-BR" sz="1600" b="0" i="0" kern="1200" dirty="0">
+                        <a:t> r0, #'</a:t>
+                      </a:r>
+                      <a:r>
+                        <a:rPr kumimoji="0" lang="pt-BR" sz="1400" b="1" i="0" kern="1200" dirty="0">
                           <a:solidFill>
                             <a:schemeClr val="tx1"/>
                           </a:solidFill>
@@ -11768,12 +11798,10 @@
                           <a:ea typeface="+mn-ea"/>
                           <a:cs typeface="+mn-cs"/>
                         </a:rPr>
-                        <a:t>'</a:t>
-                      </a:r>
-                    </a:p>
-                    <a:p>
-                      <a:r>
-                        <a:rPr kumimoji="0" lang="pt-BR" sz="1600" b="1" i="0" kern="1200" dirty="0">
+                        <a:t>B</a:t>
+                      </a:r>
+                      <a:r>
+                        <a:rPr kumimoji="0" lang="pt-BR" sz="1400" b="0" i="0" kern="1200" dirty="0">
                           <a:solidFill>
                             <a:schemeClr val="tx1"/>
                           </a:solidFill>
@@ -11782,10 +11810,24 @@
                           <a:ea typeface="+mn-ea"/>
                           <a:cs typeface="+mn-cs"/>
                         </a:rPr>
+                        <a:t>'</a:t>
+                      </a:r>
+                    </a:p>
+                    <a:p>
+                      <a:r>
+                        <a:rPr kumimoji="0" lang="pt-BR" sz="1400" b="1" i="0" kern="1200" dirty="0">
+                          <a:solidFill>
+                            <a:schemeClr val="tx1"/>
+                          </a:solidFill>
+                          <a:effectLst/>
+                          <a:latin typeface="Consolas" panose="020B0609020204030204" pitchFamily="49" charset="0"/>
+                          <a:ea typeface="+mn-ea"/>
+                          <a:cs typeface="+mn-cs"/>
+                        </a:rPr>
                         <a:t>MOVEQ</a:t>
                       </a:r>
                       <a:r>
-                        <a:rPr kumimoji="0" lang="pt-BR" sz="1600" b="0" i="0" kern="1200" dirty="0">
+                        <a:rPr kumimoji="0" lang="pt-BR" sz="1400" b="0" i="0" kern="1200" dirty="0">
                           <a:solidFill>
                             <a:schemeClr val="tx1"/>
                           </a:solidFill>
@@ -11805,7 +11847,7 @@
                     <a:bodyPr/>
                     <a:lstStyle/>
                     <a:p>
-                      <a:endParaRPr lang="en-US" sz="1600" i="0" dirty="0">
+                      <a:endParaRPr lang="en-US" sz="1400" i="0" dirty="0">
                         <a:effectLst/>
                         <a:latin typeface="Consolas" panose="020B0609020204030204" pitchFamily="49" charset="0"/>
                         <a:cs typeface="Consolas" panose="020B0609020204030204" pitchFamily="49" charset="0"/>
@@ -13206,6 +13248,14 @@
             <a:pPr lvl="1"/>
             <a:r>
               <a:rPr lang="pt-BR" dirty="0"/>
+              <a:t>IT GT</a:t>
+            </a:r>
+            <a:endParaRPr lang="en-US" dirty="0"/>
+          </a:p>
+          <a:p>
+            <a:pPr lvl="1"/>
+            <a:r>
+              <a:rPr lang="pt-BR" dirty="0"/>
               <a:t>ADDGT r0, r0, #100</a:t>
             </a:r>
             <a:endParaRPr lang="en-US" dirty="0"/>
@@ -14436,7 +14486,7 @@
                           <a:ea typeface="宋体"/>
                           <a:cs typeface="+mn-cs"/>
                         </a:rPr>
-                        <a:t>   CMP r0, #10     ; Compare x0 with 10 while x0 &lt;=10</a:t>
+                        <a:t>   CMP r0, #10     ; Compare r0 with 10 while r0 &lt;= 10</a:t>
                       </a:r>
                       <a:br>
                         <a:rPr kumimoji="0" lang="en-US" sz="1600" b="0" kern="1200" dirty="0">
@@ -14459,7 +14509,7 @@
                           <a:ea typeface="宋体"/>
                           <a:cs typeface="+mn-cs"/>
                         </a:rPr>
-                        <a:t>   BEQ end         ; If </a:t>
+                        <a:t>   BEQ done         ; If </a:t>
                       </a:r>
                       <a:r>
                         <a:rPr kumimoji="0" lang="en-US" sz="1600" b="0" kern="1200" dirty="0" err="1">
@@ -14483,7 +14533,7 @@
                           <a:ea typeface="宋体"/>
                           <a:cs typeface="+mn-cs"/>
                         </a:rPr>
-                        <a:t> == 10, branch to end</a:t>
+                        <a:t> == 10, branch to done</a:t>
                       </a:r>
                       <a:br>
                         <a:rPr kumimoji="0" lang="en-US" sz="1600" b="0" kern="1200" dirty="0">
